--- a/homepage2026/Document/2학기/1주차/1주차 수업 .pptx
+++ b/homepage2026/Document/2학기/1주차/1주차 수업 .pptx
@@ -259,7 +259,7 @@
           <a:p>
             <a:fld id="{FA04ACB9-29EA-4272-9C4F-30348B199F95}" type="datetimeFigureOut">
               <a:rPr lang="ko-KR" altLang="en-US" smtClean="0"/>
-              <a:t>2026-08-18</a:t>
+              <a:t>2026-08-25</a:t>
             </a:fld>
             <a:endParaRPr lang="ko-KR" altLang="en-US"/>
           </a:p>
@@ -457,7 +457,7 @@
           <a:p>
             <a:fld id="{FA04ACB9-29EA-4272-9C4F-30348B199F95}" type="datetimeFigureOut">
               <a:rPr lang="ko-KR" altLang="en-US" smtClean="0"/>
-              <a:t>2026-08-18</a:t>
+              <a:t>2026-08-25</a:t>
             </a:fld>
             <a:endParaRPr lang="ko-KR" altLang="en-US"/>
           </a:p>
@@ -665,7 +665,7 @@
           <a:p>
             <a:fld id="{FA04ACB9-29EA-4272-9C4F-30348B199F95}" type="datetimeFigureOut">
               <a:rPr lang="ko-KR" altLang="en-US" smtClean="0"/>
-              <a:t>2026-08-18</a:t>
+              <a:t>2026-08-25</a:t>
             </a:fld>
             <a:endParaRPr lang="ko-KR" altLang="en-US"/>
           </a:p>
@@ -863,7 +863,7 @@
           <a:p>
             <a:fld id="{FA04ACB9-29EA-4272-9C4F-30348B199F95}" type="datetimeFigureOut">
               <a:rPr lang="ko-KR" altLang="en-US" smtClean="0"/>
-              <a:t>2026-08-18</a:t>
+              <a:t>2026-08-25</a:t>
             </a:fld>
             <a:endParaRPr lang="ko-KR" altLang="en-US"/>
           </a:p>
@@ -1138,7 +1138,7 @@
           <a:p>
             <a:fld id="{FA04ACB9-29EA-4272-9C4F-30348B199F95}" type="datetimeFigureOut">
               <a:rPr lang="ko-KR" altLang="en-US" smtClean="0"/>
-              <a:t>2026-08-18</a:t>
+              <a:t>2026-08-25</a:t>
             </a:fld>
             <a:endParaRPr lang="ko-KR" altLang="en-US"/>
           </a:p>
@@ -1403,7 +1403,7 @@
           <a:p>
             <a:fld id="{FA04ACB9-29EA-4272-9C4F-30348B199F95}" type="datetimeFigureOut">
               <a:rPr lang="ko-KR" altLang="en-US" smtClean="0"/>
-              <a:t>2026-08-18</a:t>
+              <a:t>2026-08-25</a:t>
             </a:fld>
             <a:endParaRPr lang="ko-KR" altLang="en-US"/>
           </a:p>
@@ -1815,7 +1815,7 @@
           <a:p>
             <a:fld id="{FA04ACB9-29EA-4272-9C4F-30348B199F95}" type="datetimeFigureOut">
               <a:rPr lang="ko-KR" altLang="en-US" smtClean="0"/>
-              <a:t>2026-08-18</a:t>
+              <a:t>2026-08-25</a:t>
             </a:fld>
             <a:endParaRPr lang="ko-KR" altLang="en-US"/>
           </a:p>
@@ -1956,7 +1956,7 @@
           <a:p>
             <a:fld id="{FA04ACB9-29EA-4272-9C4F-30348B199F95}" type="datetimeFigureOut">
               <a:rPr lang="ko-KR" altLang="en-US" smtClean="0"/>
-              <a:t>2026-08-18</a:t>
+              <a:t>2026-08-25</a:t>
             </a:fld>
             <a:endParaRPr lang="ko-KR" altLang="en-US"/>
           </a:p>
@@ -2069,7 +2069,7 @@
           <a:p>
             <a:fld id="{FA04ACB9-29EA-4272-9C4F-30348B199F95}" type="datetimeFigureOut">
               <a:rPr lang="ko-KR" altLang="en-US" smtClean="0"/>
-              <a:t>2026-08-18</a:t>
+              <a:t>2026-08-25</a:t>
             </a:fld>
             <a:endParaRPr lang="ko-KR" altLang="en-US"/>
           </a:p>
@@ -2380,7 +2380,7 @@
           <a:p>
             <a:fld id="{FA04ACB9-29EA-4272-9C4F-30348B199F95}" type="datetimeFigureOut">
               <a:rPr lang="ko-KR" altLang="en-US" smtClean="0"/>
-              <a:t>2026-08-18</a:t>
+              <a:t>2026-08-25</a:t>
             </a:fld>
             <a:endParaRPr lang="ko-KR" altLang="en-US"/>
           </a:p>
@@ -2668,7 +2668,7 @@
           <a:p>
             <a:fld id="{FA04ACB9-29EA-4272-9C4F-30348B199F95}" type="datetimeFigureOut">
               <a:rPr lang="ko-KR" altLang="en-US" smtClean="0"/>
-              <a:t>2026-08-18</a:t>
+              <a:t>2026-08-25</a:t>
             </a:fld>
             <a:endParaRPr lang="ko-KR" altLang="en-US"/>
           </a:p>
@@ -2909,7 +2909,7 @@
           <a:p>
             <a:fld id="{FA04ACB9-29EA-4272-9C4F-30348B199F95}" type="datetimeFigureOut">
               <a:rPr lang="ko-KR" altLang="en-US" smtClean="0"/>
-              <a:t>2026-08-18</a:t>
+              <a:t>2026-08-25</a:t>
             </a:fld>
             <a:endParaRPr lang="ko-KR" altLang="en-US"/>
           </a:p>
@@ -3341,7 +3341,7 @@
         <p:spPr>
           <a:xfrm>
             <a:off x="452846" y="548640"/>
-            <a:ext cx="9571851" cy="1754326"/>
+            <a:ext cx="9571851" cy="2031325"/>
           </a:xfrm>
           <a:prstGeom prst="rect">
             <a:avLst/>
@@ -3456,6 +3456,17 @@
             </a:r>
             <a:r>
               <a:rPr lang="ko-KR" altLang="en-US" dirty="0"/>
+              <a:t>로그아웃</a:t>
+            </a:r>
+            <a:endParaRPr lang="en-US" altLang="ko-KR" dirty="0"/>
+          </a:p>
+          <a:p>
+            <a:r>
+              <a:rPr lang="en-US" altLang="ko-KR" dirty="0"/>
+              <a:t>4. </a:t>
+            </a:r>
+            <a:r>
+              <a:rPr lang="ko-KR" altLang="en-US" dirty="0"/>
               <a:t>회원 관리자페이지</a:t>
             </a:r>
             <a:r>
@@ -3471,7 +3482,7 @@
           <a:p>
             <a:r>
               <a:rPr lang="en-US" altLang="ko-KR" dirty="0"/>
-              <a:t>4. </a:t>
+              <a:t>5. </a:t>
             </a:r>
             <a:r>
               <a:rPr lang="ko-KR" altLang="en-US" dirty="0"/>
@@ -3515,7 +3526,7 @@
           <a:p>
             <a:r>
               <a:rPr lang="en-US" altLang="ko-KR" dirty="0"/>
-              <a:t>5. </a:t>
+              <a:t>6. </a:t>
             </a:r>
             <a:r>
               <a:rPr lang="ko-KR" altLang="en-US" dirty="0"/>
